--- a/Documents/Presentation/Project Update/Project Update 4 (week7 & 8).pptx
+++ b/Documents/Presentation/Project Update/Project Update 4 (week7 & 8).pptx
@@ -3602,7 +3602,7 @@
             <p:ph idx="1"/>
             <p:extLst>
               <p:ext uri="{D42A27DB-BD31-4B8C-83A1-F6EECF244321}">
-                <p14:modId xmlns:p14="http://schemas.microsoft.com/office/powerpoint/2010/main" val="2283565040"/>
+                <p14:modId xmlns:p14="http://schemas.microsoft.com/office/powerpoint/2010/main" val="1587241934"/>
               </p:ext>
             </p:extLst>
           </p:nvPr>
@@ -3671,13 +3671,13 @@
                         <a:buNone/>
                       </a:pPr>
                       <a:r>
-                        <a:rPr lang="en-US" sz="1400" b="1" u="none" strike="noStrike" dirty="0">
+                        <a:rPr lang="en-US" sz="1800" b="1" u="none" strike="noStrike" dirty="0">
                           <a:effectLst/>
                           <a:latin typeface="Candara" panose="020E0502030303020204" pitchFamily="34" charset="0"/>
                         </a:rPr>
                         <a:t>Project Progress Update</a:t>
                       </a:r>
-                      <a:endParaRPr lang="en-US" sz="1400" b="1" i="0" u="none" strike="noStrike" dirty="0">
+                      <a:endParaRPr lang="en-US" sz="1800" b="1" i="0" u="none" strike="noStrike" dirty="0">
                         <a:solidFill>
                           <a:srgbClr val="000000"/>
                         </a:solidFill>
@@ -3754,13 +3754,13 @@
                         <a:buNone/>
                       </a:pPr>
                       <a:r>
-                        <a:rPr lang="en-US" sz="1400" u="none" strike="noStrike" dirty="0">
+                        <a:rPr lang="en-US" sz="1600" b="1" u="none" strike="noStrike" dirty="0">
                           <a:effectLst/>
                           <a:latin typeface="Candara" panose="020E0502030303020204" pitchFamily="34" charset="0"/>
                         </a:rPr>
                         <a:t>Time Period</a:t>
                       </a:r>
-                      <a:endParaRPr lang="en-US" sz="1400" b="1" i="0" u="none" strike="noStrike" dirty="0">
+                      <a:endParaRPr lang="en-US" sz="1600" b="1" i="0" u="none" strike="noStrike" dirty="0">
                         <a:solidFill>
                           <a:srgbClr val="000000"/>
                         </a:solidFill>
@@ -3780,13 +3780,13 @@
                         <a:buNone/>
                       </a:pPr>
                       <a:r>
-                        <a:rPr lang="en-US" sz="1400" u="none" strike="noStrike" dirty="0">
+                        <a:rPr lang="en-US" sz="1600" b="1" u="none" strike="noStrike" dirty="0">
                           <a:effectLst/>
                           <a:latin typeface="Candara" panose="020E0502030303020204" pitchFamily="34" charset="0"/>
                         </a:rPr>
                         <a:t>Dates</a:t>
                       </a:r>
-                      <a:endParaRPr lang="en-US" sz="1400" b="1" i="0" u="none" strike="noStrike" dirty="0">
+                      <a:endParaRPr lang="en-US" sz="1600" b="1" i="0" u="none" strike="noStrike" dirty="0">
                         <a:solidFill>
                           <a:srgbClr val="000000"/>
                         </a:solidFill>
@@ -3806,13 +3806,13 @@
                         <a:buNone/>
                       </a:pPr>
                       <a:r>
-                        <a:rPr lang="en-US" sz="1400" u="none" strike="noStrike">
+                        <a:rPr lang="en-US" sz="1600" b="1" u="none" strike="noStrike">
                           <a:effectLst/>
                           <a:latin typeface="Candara" panose="020E0502030303020204" pitchFamily="34" charset="0"/>
                         </a:rPr>
                         <a:t> </a:t>
                       </a:r>
-                      <a:endParaRPr lang="en-US" sz="1400" b="1" i="0" u="none" strike="noStrike">
+                      <a:endParaRPr lang="en-US" sz="1600" b="1" i="0" u="none" strike="noStrike">
                         <a:solidFill>
                           <a:srgbClr val="000000"/>
                         </a:solidFill>
@@ -3832,13 +3832,13 @@
                         <a:buNone/>
                       </a:pPr>
                       <a:r>
-                        <a:rPr lang="en-US" sz="1400" u="none" strike="noStrike">
+                        <a:rPr lang="en-US" sz="1600" b="1" u="none" strike="noStrike" dirty="0">
                           <a:effectLst/>
                           <a:latin typeface="Candara" panose="020E0502030303020204" pitchFamily="34" charset="0"/>
                         </a:rPr>
                         <a:t>Focus</a:t>
                       </a:r>
-                      <a:endParaRPr lang="en-US" sz="1400" b="1" i="0" u="none" strike="noStrike">
+                      <a:endParaRPr lang="en-US" sz="1600" b="1" i="0" u="none" strike="noStrike" dirty="0">
                         <a:solidFill>
                           <a:srgbClr val="000000"/>
                         </a:solidFill>
@@ -3858,13 +3858,13 @@
                         <a:buNone/>
                       </a:pPr>
                       <a:r>
-                        <a:rPr lang="en-US" sz="1400" u="none" strike="noStrike">
+                        <a:rPr lang="en-US" sz="1600" b="1" u="none" strike="noStrike">
                           <a:effectLst/>
                           <a:latin typeface="Candara" panose="020E0502030303020204" pitchFamily="34" charset="0"/>
                         </a:rPr>
                         <a:t> </a:t>
                       </a:r>
-                      <a:endParaRPr lang="en-US" sz="1400" b="1" i="0" u="none" strike="noStrike">
+                      <a:endParaRPr lang="en-US" sz="1600" b="1" i="0" u="none" strike="noStrike">
                         <a:solidFill>
                           <a:srgbClr val="000000"/>
                         </a:solidFill>
@@ -3884,13 +3884,13 @@
                         <a:buNone/>
                       </a:pPr>
                       <a:r>
-                        <a:rPr lang="en-US" sz="1400" u="none" strike="noStrike">
+                        <a:rPr lang="en-US" sz="1600" b="1" u="none" strike="noStrike" dirty="0">
                           <a:effectLst/>
                           <a:latin typeface="Candara" panose="020E0502030303020204" pitchFamily="34" charset="0"/>
                         </a:rPr>
                         <a:t>Status/Progress Update</a:t>
                       </a:r>
-                      <a:endParaRPr lang="en-US" sz="1400" b="1" i="0" u="none" strike="noStrike">
+                      <a:endParaRPr lang="en-US" sz="1600" b="1" i="0" u="none" strike="noStrike" dirty="0">
                         <a:solidFill>
                           <a:srgbClr val="000000"/>
                         </a:solidFill>
@@ -3918,6 +3918,9 @@
                       </a:pPr>
                       <a:r>
                         <a:rPr lang="en-US" sz="1400" u="none" strike="noStrike" dirty="0">
+                          <a:solidFill>
+                            <a:srgbClr val="0070C0"/>
+                          </a:solidFill>
                           <a:effectLst/>
                           <a:latin typeface="Candara" panose="020E0502030303020204" pitchFamily="34" charset="0"/>
                         </a:rPr>
@@ -3925,7 +3928,7 @@
                       </a:r>
                       <a:endParaRPr lang="en-US" sz="1400" b="1" i="0" u="none" strike="noStrike" dirty="0">
                         <a:solidFill>
-                          <a:srgbClr val="000000"/>
+                          <a:srgbClr val="0070C0"/>
                         </a:solidFill>
                         <a:effectLst/>
                         <a:latin typeface="Candara" panose="020E0502030303020204" pitchFamily="34" charset="0"/>
@@ -3944,6 +3947,9 @@
                       </a:pPr>
                       <a:r>
                         <a:rPr lang="en-US" sz="1400" u="none" strike="noStrike" dirty="0">
+                          <a:solidFill>
+                            <a:srgbClr val="0070C0"/>
+                          </a:solidFill>
                           <a:effectLst/>
                           <a:latin typeface="Candara" panose="020E0502030303020204" pitchFamily="34" charset="0"/>
                         </a:rPr>
@@ -3951,7 +3957,7 @@
                       </a:r>
                       <a:endParaRPr lang="en-US" sz="1400" b="0" i="0" u="none" strike="noStrike" dirty="0">
                         <a:solidFill>
-                          <a:srgbClr val="000000"/>
+                          <a:srgbClr val="0070C0"/>
                         </a:solidFill>
                         <a:effectLst/>
                         <a:latin typeface="Candara" panose="020E0502030303020204" pitchFamily="34" charset="0"/>
@@ -3970,6 +3976,9 @@
                       </a:pPr>
                       <a:r>
                         <a:rPr lang="en-US" sz="1400" u="none" strike="noStrike">
+                          <a:solidFill>
+                            <a:srgbClr val="0070C0"/>
+                          </a:solidFill>
                           <a:effectLst/>
                           <a:latin typeface="Candara" panose="020E0502030303020204" pitchFamily="34" charset="0"/>
                         </a:rPr>
@@ -3977,7 +3986,7 @@
                       </a:r>
                       <a:endParaRPr lang="en-US" sz="1400" b="0" i="0" u="none" strike="noStrike">
                         <a:solidFill>
-                          <a:srgbClr val="000000"/>
+                          <a:srgbClr val="0070C0"/>
                         </a:solidFill>
                         <a:effectLst/>
                         <a:latin typeface="Candara" panose="020E0502030303020204" pitchFamily="34" charset="0"/>
@@ -3996,6 +4005,9 @@
                       </a:pPr>
                       <a:r>
                         <a:rPr lang="en-US" sz="1400" u="none" strike="noStrike" dirty="0">
+                          <a:solidFill>
+                            <a:srgbClr val="0070C0"/>
+                          </a:solidFill>
                           <a:effectLst/>
                           <a:latin typeface="Candara" panose="020E0502030303020204" pitchFamily="34" charset="0"/>
                         </a:rPr>
@@ -4003,7 +4015,7 @@
                       </a:r>
                       <a:endParaRPr lang="en-US" sz="1400" b="1" i="0" u="none" strike="noStrike" dirty="0">
                         <a:solidFill>
-                          <a:srgbClr val="000000"/>
+                          <a:srgbClr val="0070C0"/>
                         </a:solidFill>
                         <a:effectLst/>
                         <a:latin typeface="Candara" panose="020E0502030303020204" pitchFamily="34" charset="0"/>
@@ -4022,6 +4034,9 @@
                       </a:pPr>
                       <a:r>
                         <a:rPr lang="en-US" sz="1400" u="none" strike="noStrike">
+                          <a:solidFill>
+                            <a:srgbClr val="0070C0"/>
+                          </a:solidFill>
                           <a:effectLst/>
                           <a:latin typeface="Candara" panose="020E0502030303020204" pitchFamily="34" charset="0"/>
                         </a:rPr>
@@ -4029,7 +4044,7 @@
                       </a:r>
                       <a:endParaRPr lang="en-US" sz="1400" b="1" i="0" u="none" strike="noStrike">
                         <a:solidFill>
-                          <a:srgbClr val="000000"/>
+                          <a:srgbClr val="0070C0"/>
                         </a:solidFill>
                         <a:effectLst/>
                         <a:latin typeface="Candara" panose="020E0502030303020204" pitchFamily="34" charset="0"/>
@@ -4047,15 +4062,38 @@
                         <a:buNone/>
                       </a:pPr>
                       <a:r>
-                        <a:rPr lang="en-US" sz="1400" u="none" strike="noStrike">
+                        <a:rPr lang="en-US" sz="1400" u="none" strike="noStrike" dirty="0">
+                          <a:solidFill>
+                            <a:srgbClr val="0070C0"/>
+                          </a:solidFill>
                           <a:effectLst/>
                           <a:latin typeface="Candara" panose="020E0502030303020204" pitchFamily="34" charset="0"/>
                         </a:rPr>
-                        <a:t>Project charter approved; requirements documented; architecture defined (MQTT → API → SQL → SignalR → React).</a:t>
-                      </a:r>
-                      <a:endParaRPr lang="en-US" sz="1400" b="0" i="0" u="none" strike="noStrike">
+                        <a:t>Project charter approved; requirements documented; architecture defined (MQTT → API → SQL → </a:t>
+                      </a:r>
+                      <a:r>
+                        <a:rPr lang="en-US" sz="1400" u="none" strike="noStrike" dirty="0" err="1">
+                          <a:solidFill>
+                            <a:srgbClr val="0070C0"/>
+                          </a:solidFill>
+                          <a:effectLst/>
+                          <a:latin typeface="Candara" panose="020E0502030303020204" pitchFamily="34" charset="0"/>
+                        </a:rPr>
+                        <a:t>SignalR</a:t>
+                      </a:r>
+                      <a:r>
+                        <a:rPr lang="en-US" sz="1400" u="none" strike="noStrike" dirty="0">
+                          <a:solidFill>
+                            <a:srgbClr val="0070C0"/>
+                          </a:solidFill>
+                          <a:effectLst/>
+                          <a:latin typeface="Candara" panose="020E0502030303020204" pitchFamily="34" charset="0"/>
+                        </a:rPr>
+                        <a:t> → React).</a:t>
+                      </a:r>
+                      <a:endParaRPr lang="en-US" sz="1400" b="0" i="0" u="none" strike="noStrike" dirty="0">
                         <a:solidFill>
-                          <a:srgbClr val="000000"/>
+                          <a:srgbClr val="0070C0"/>
                         </a:solidFill>
                         <a:effectLst/>
                         <a:latin typeface="Candara" panose="020E0502030303020204" pitchFamily="34" charset="0"/>
@@ -4081,6 +4119,9 @@
                       </a:pPr>
                       <a:r>
                         <a:rPr lang="en-US" sz="1400" u="none" strike="noStrike">
+                          <a:solidFill>
+                            <a:srgbClr val="0070C0"/>
+                          </a:solidFill>
                           <a:effectLst/>
                           <a:latin typeface="Candara" panose="020E0502030303020204" pitchFamily="34" charset="0"/>
                         </a:rPr>
@@ -4088,7 +4129,7 @@
                       </a:r>
                       <a:endParaRPr lang="en-US" sz="1400" b="1" i="0" u="none" strike="noStrike">
                         <a:solidFill>
-                          <a:srgbClr val="000000"/>
+                          <a:srgbClr val="0070C0"/>
                         </a:solidFill>
                         <a:effectLst/>
                         <a:latin typeface="Candara" panose="020E0502030303020204" pitchFamily="34" charset="0"/>
@@ -4107,6 +4148,9 @@
                       </a:pPr>
                       <a:r>
                         <a:rPr lang="en-US" sz="1400" u="none" strike="noStrike" dirty="0">
+                          <a:solidFill>
+                            <a:srgbClr val="0070C0"/>
+                          </a:solidFill>
                           <a:effectLst/>
                           <a:latin typeface="Candara" panose="020E0502030303020204" pitchFamily="34" charset="0"/>
                         </a:rPr>
@@ -4114,7 +4158,7 @@
                       </a:r>
                       <a:endParaRPr lang="en-US" sz="1400" b="0" i="0" u="none" strike="noStrike" dirty="0">
                         <a:solidFill>
-                          <a:srgbClr val="000000"/>
+                          <a:srgbClr val="0070C0"/>
                         </a:solidFill>
                         <a:effectLst/>
                         <a:latin typeface="Candara" panose="020E0502030303020204" pitchFamily="34" charset="0"/>
@@ -4133,6 +4177,9 @@
                       </a:pPr>
                       <a:r>
                         <a:rPr lang="en-US" sz="1400" u="none" strike="noStrike">
+                          <a:solidFill>
+                            <a:srgbClr val="0070C0"/>
+                          </a:solidFill>
                           <a:effectLst/>
                           <a:latin typeface="Candara" panose="020E0502030303020204" pitchFamily="34" charset="0"/>
                         </a:rPr>
@@ -4140,7 +4187,7 @@
                       </a:r>
                       <a:endParaRPr lang="en-US" sz="1400" b="0" i="0" u="none" strike="noStrike">
                         <a:solidFill>
-                          <a:srgbClr val="000000"/>
+                          <a:srgbClr val="0070C0"/>
                         </a:solidFill>
                         <a:effectLst/>
                         <a:latin typeface="Candara" panose="020E0502030303020204" pitchFamily="34" charset="0"/>
@@ -4159,6 +4206,9 @@
                       </a:pPr>
                       <a:r>
                         <a:rPr lang="en-US" sz="1400" u="none" strike="noStrike" dirty="0">
+                          <a:solidFill>
+                            <a:srgbClr val="0070C0"/>
+                          </a:solidFill>
                           <a:effectLst/>
                           <a:latin typeface="Candara" panose="020E0502030303020204" pitchFamily="34" charset="0"/>
                         </a:rPr>
@@ -4166,7 +4216,7 @@
                       </a:r>
                       <a:endParaRPr lang="en-US" sz="1400" b="1" i="0" u="none" strike="noStrike" dirty="0">
                         <a:solidFill>
-                          <a:srgbClr val="000000"/>
+                          <a:srgbClr val="0070C0"/>
                         </a:solidFill>
                         <a:effectLst/>
                         <a:latin typeface="Candara" panose="020E0502030303020204" pitchFamily="34" charset="0"/>
@@ -4184,15 +4234,18 @@
                         <a:buNone/>
                       </a:pPr>
                       <a:r>
-                        <a:rPr lang="en-US" sz="1400" u="none" strike="noStrike">
+                        <a:rPr lang="en-US" sz="1400" u="none" strike="noStrike" dirty="0">
+                          <a:solidFill>
+                            <a:srgbClr val="0070C0"/>
+                          </a:solidFill>
                           <a:effectLst/>
                           <a:latin typeface="Candara" panose="020E0502030303020204" pitchFamily="34" charset="0"/>
                         </a:rPr>
                         <a:t> </a:t>
                       </a:r>
-                      <a:endParaRPr lang="en-US" sz="1400" b="1" i="0" u="none" strike="noStrike">
+                      <a:endParaRPr lang="en-US" sz="1400" b="1" i="0" u="none" strike="noStrike" dirty="0">
                         <a:solidFill>
-                          <a:srgbClr val="000000"/>
+                          <a:srgbClr val="0070C0"/>
                         </a:solidFill>
                         <a:effectLst/>
                         <a:latin typeface="Candara" panose="020E0502030303020204" pitchFamily="34" charset="0"/>
@@ -4210,15 +4263,18 @@
                         <a:buNone/>
                       </a:pPr>
                       <a:r>
-                        <a:rPr lang="en-US" sz="1400" u="none" strike="noStrike">
+                        <a:rPr lang="en-US" sz="1400" u="none" strike="noStrike" dirty="0">
+                          <a:solidFill>
+                            <a:srgbClr val="0070C0"/>
+                          </a:solidFill>
                           <a:effectLst/>
                           <a:latin typeface="Candara" panose="020E0502030303020204" pitchFamily="34" charset="0"/>
                         </a:rPr>
                         <a:t>SQL schema designed; EF Core entities &amp; migrations applied; seed/test data loaded.</a:t>
                       </a:r>
-                      <a:endParaRPr lang="en-US" sz="1400" b="0" i="0" u="none" strike="noStrike">
+                      <a:endParaRPr lang="en-US" sz="1400" b="0" i="0" u="none" strike="noStrike" dirty="0">
                         <a:solidFill>
-                          <a:srgbClr val="000000"/>
+                          <a:srgbClr val="0070C0"/>
                         </a:solidFill>
                         <a:effectLst/>
                         <a:latin typeface="Candara" panose="020E0502030303020204" pitchFamily="34" charset="0"/>
@@ -4244,6 +4300,9 @@
                       </a:pPr>
                       <a:r>
                         <a:rPr lang="en-US" sz="1400" u="none" strike="noStrike">
+                          <a:solidFill>
+                            <a:srgbClr val="0070C0"/>
+                          </a:solidFill>
                           <a:effectLst/>
                           <a:latin typeface="Candara" panose="020E0502030303020204" pitchFamily="34" charset="0"/>
                         </a:rPr>
@@ -4251,7 +4310,7 @@
                       </a:r>
                       <a:endParaRPr lang="en-US" sz="1400" b="1" i="0" u="none" strike="noStrike">
                         <a:solidFill>
-                          <a:srgbClr val="000000"/>
+                          <a:srgbClr val="0070C0"/>
                         </a:solidFill>
                         <a:effectLst/>
                         <a:latin typeface="Candara" panose="020E0502030303020204" pitchFamily="34" charset="0"/>
@@ -4270,6 +4329,9 @@
                       </a:pPr>
                       <a:r>
                         <a:rPr lang="en-US" sz="1400" u="none" strike="noStrike">
+                          <a:solidFill>
+                            <a:srgbClr val="0070C0"/>
+                          </a:solidFill>
                           <a:effectLst/>
                           <a:latin typeface="Candara" panose="020E0502030303020204" pitchFamily="34" charset="0"/>
                         </a:rPr>
@@ -4277,7 +4339,7 @@
                       </a:r>
                       <a:endParaRPr lang="en-US" sz="1400" b="0" i="0" u="none" strike="noStrike">
                         <a:solidFill>
-                          <a:srgbClr val="000000"/>
+                          <a:srgbClr val="0070C0"/>
                         </a:solidFill>
                         <a:effectLst/>
                         <a:latin typeface="Candara" panose="020E0502030303020204" pitchFamily="34" charset="0"/>
@@ -4296,6 +4358,9 @@
                       </a:pPr>
                       <a:r>
                         <a:rPr lang="en-US" sz="1400" u="none" strike="noStrike">
+                          <a:solidFill>
+                            <a:srgbClr val="0070C0"/>
+                          </a:solidFill>
                           <a:effectLst/>
                           <a:latin typeface="Candara" panose="020E0502030303020204" pitchFamily="34" charset="0"/>
                         </a:rPr>
@@ -4303,7 +4368,7 @@
                       </a:r>
                       <a:endParaRPr lang="en-US" sz="1400" b="0" i="0" u="none" strike="noStrike">
                         <a:solidFill>
-                          <a:srgbClr val="000000"/>
+                          <a:srgbClr val="0070C0"/>
                         </a:solidFill>
                         <a:effectLst/>
                         <a:latin typeface="Candara" panose="020E0502030303020204" pitchFamily="34" charset="0"/>
@@ -4322,6 +4387,9 @@
                       </a:pPr>
                       <a:r>
                         <a:rPr lang="en-US" sz="1400" u="none" strike="noStrike" dirty="0">
+                          <a:solidFill>
+                            <a:srgbClr val="0070C0"/>
+                          </a:solidFill>
                           <a:effectLst/>
                           <a:latin typeface="Candara" panose="020E0502030303020204" pitchFamily="34" charset="0"/>
                         </a:rPr>
@@ -4329,6 +4397,9 @@
                       </a:r>
                       <a:r>
                         <a:rPr lang="en-US" sz="1400" u="none" strike="noStrike" dirty="0" err="1">
+                          <a:solidFill>
+                            <a:srgbClr val="0070C0"/>
+                          </a:solidFill>
                           <a:effectLst/>
                           <a:latin typeface="Candara" panose="020E0502030303020204" pitchFamily="34" charset="0"/>
                         </a:rPr>
@@ -4336,6 +4407,9 @@
                       </a:r>
                       <a:r>
                         <a:rPr lang="en-US" sz="1400" u="none" strike="noStrike" dirty="0">
+                          <a:solidFill>
+                            <a:srgbClr val="0070C0"/>
+                          </a:solidFill>
                           <a:effectLst/>
                           <a:latin typeface="Candara" panose="020E0502030303020204" pitchFamily="34" charset="0"/>
                         </a:rPr>
@@ -4343,7 +4417,7 @@
                       </a:r>
                       <a:endParaRPr lang="en-US" sz="1400" b="0" i="0" u="none" strike="noStrike" dirty="0">
                         <a:solidFill>
-                          <a:srgbClr val="000000"/>
+                          <a:srgbClr val="0070C0"/>
                         </a:solidFill>
                         <a:effectLst/>
                         <a:latin typeface="Candara" panose="020E0502030303020204" pitchFamily="34" charset="0"/>
@@ -4362,6 +4436,9 @@
                       </a:pPr>
                       <a:r>
                         <a:rPr lang="en-US" sz="1400" u="none" strike="noStrike">
+                          <a:solidFill>
+                            <a:srgbClr val="0070C0"/>
+                          </a:solidFill>
                           <a:effectLst/>
                           <a:latin typeface="Candara" panose="020E0502030303020204" pitchFamily="34" charset="0"/>
                         </a:rPr>
@@ -4369,7 +4446,7 @@
                       </a:r>
                       <a:endParaRPr lang="en-US" sz="1400" b="0" i="0" u="none" strike="noStrike">
                         <a:solidFill>
-                          <a:srgbClr val="000000"/>
+                          <a:srgbClr val="0070C0"/>
                         </a:solidFill>
                         <a:effectLst/>
                         <a:latin typeface="Candara" panose="020E0502030303020204" pitchFamily="34" charset="0"/>
@@ -4388,6 +4465,9 @@
                       </a:pPr>
                       <a:r>
                         <a:rPr lang="en-US" sz="1400" u="none" strike="noStrike" dirty="0">
+                          <a:solidFill>
+                            <a:srgbClr val="0070C0"/>
+                          </a:solidFill>
                           <a:effectLst/>
                           <a:latin typeface="Candara" panose="020E0502030303020204" pitchFamily="34" charset="0"/>
                         </a:rPr>
@@ -4395,6 +4475,9 @@
                       </a:r>
                       <a:r>
                         <a:rPr lang="en-US" sz="1400" u="none" strike="noStrike" dirty="0" err="1">
+                          <a:solidFill>
+                            <a:srgbClr val="0070C0"/>
+                          </a:solidFill>
                           <a:effectLst/>
                           <a:latin typeface="Candara" panose="020E0502030303020204" pitchFamily="34" charset="0"/>
                         </a:rPr>
@@ -4402,6 +4485,9 @@
                       </a:r>
                       <a:r>
                         <a:rPr lang="en-US" sz="1400" u="none" strike="noStrike" dirty="0">
+                          <a:solidFill>
+                            <a:srgbClr val="0070C0"/>
+                          </a:solidFill>
                           <a:effectLst/>
                           <a:latin typeface="Candara" panose="020E0502030303020204" pitchFamily="34" charset="0"/>
                         </a:rPr>
@@ -4409,7 +4495,7 @@
                       </a:r>
                       <a:endParaRPr lang="en-US" sz="1400" b="0" i="0" u="none" strike="noStrike" dirty="0">
                         <a:solidFill>
-                          <a:srgbClr val="000000"/>
+                          <a:srgbClr val="0070C0"/>
                         </a:solidFill>
                         <a:effectLst/>
                         <a:latin typeface="Candara" panose="020E0502030303020204" pitchFamily="34" charset="0"/>
